--- a/BROmoters_prezentacja.pptx
+++ b/BROmoters_prezentacja.pptx
@@ -1123,7 +1123,7 @@
       </p:grpSpPr>
       <p:sp>
         <p:nvSpPr>
-          <p:cNvPr id="82" name="Google Shape;82;g3f8a6cc94e3_1_50:notes"/>
+          <p:cNvPr id="82" name="Google Shape;82;g3f8a6cc92ca_0_346:notes"/>
           <p:cNvSpPr/>
           <p:nvPr>
             <p:ph idx="2" type="sldImg"/>
@@ -1158,7 +1158,7 @@
       </p:sp>
       <p:sp>
         <p:nvSpPr>
-          <p:cNvPr id="83" name="Google Shape;83;g3f8a6cc94e3_1_50:notes"/>
+          <p:cNvPr id="83" name="Google Shape;83;g3f8a6cc92ca_0_346:notes"/>
           <p:cNvSpPr txBox="1"/>
           <p:nvPr>
             <p:ph idx="1" type="body"/>
@@ -1208,7 +1208,7 @@
   <p:cSld>
     <p:spTree>
       <p:nvGrpSpPr>
-        <p:cNvPr id="87" name="Shape 87"/>
+        <p:cNvPr id="96" name="Shape 96"/>
         <p:cNvGrpSpPr/>
         <p:nvPr/>
       </p:nvGrpSpPr>
@@ -1222,7 +1222,7 @@
       </p:grpSpPr>
       <p:sp>
         <p:nvSpPr>
-          <p:cNvPr id="88" name="Google Shape;88;g3f8a6cc92ca_0_346:notes"/>
+          <p:cNvPr id="97" name="Google Shape;97;g3f8a6cc94e3_1_50:notes"/>
           <p:cNvSpPr/>
           <p:nvPr>
             <p:ph idx="2" type="sldImg"/>
@@ -1257,7 +1257,7 @@
       </p:sp>
       <p:sp>
         <p:nvSpPr>
-          <p:cNvPr id="89" name="Google Shape;89;g3f8a6cc92ca_0_346:notes"/>
+          <p:cNvPr id="98" name="Google Shape;98;g3f8a6cc94e3_1_50:notes"/>
           <p:cNvSpPr txBox="1"/>
           <p:nvPr>
             <p:ph idx="1" type="body"/>
@@ -1307,7 +1307,7 @@
   <p:cSld>
     <p:spTree>
       <p:nvGrpSpPr>
-        <p:cNvPr id="101" name="Shape 101"/>
+        <p:cNvPr id="102" name="Shape 102"/>
         <p:cNvGrpSpPr/>
         <p:nvPr/>
       </p:nvGrpSpPr>
@@ -1321,7 +1321,7 @@
       </p:grpSpPr>
       <p:sp>
         <p:nvSpPr>
-          <p:cNvPr id="102" name="Google Shape;102;g3f8a6cc94e3_1_42:notes"/>
+          <p:cNvPr id="103" name="Google Shape;103;g3f8a6cc94e3_1_42:notes"/>
           <p:cNvSpPr/>
           <p:nvPr>
             <p:ph idx="2" type="sldImg"/>
@@ -1356,7 +1356,7 @@
       </p:sp>
       <p:sp>
         <p:nvSpPr>
-          <p:cNvPr id="103" name="Google Shape;103;g3f8a6cc94e3_1_42:notes"/>
+          <p:cNvPr id="104" name="Google Shape;104;g3f8a6cc94e3_1_42:notes"/>
           <p:cNvSpPr txBox="1"/>
           <p:nvPr>
             <p:ph idx="1" type="body"/>
@@ -7339,7 +7339,23 @@
             </a:pPr>
             <a:r>
               <a:rPr lang="pl"/>
-              <a:t>Nasza Pętla</a:t>
+              <a:t>Nasza Pętla - algorytm</a:t>
+            </a:r>
+            <a:endParaRPr/>
+          </a:p>
+          <a:p>
+            <a:pPr indent="0" lvl="0" marL="0" rtl="0" algn="l">
+              <a:spcBef>
+                <a:spcPts val="0"/>
+              </a:spcBef>
+              <a:spcAft>
+                <a:spcPts val="0"/>
+              </a:spcAft>
+              <a:buNone/>
+            </a:pPr>
+            <a:r>
+              <a:rPr lang="pl"/>
+              <a:t>ewolucyjny</a:t>
             </a:r>
             <a:endParaRPr/>
           </a:p>
@@ -7404,7 +7420,7 @@
         </p:blipFill>
         <p:spPr>
           <a:xfrm>
-            <a:off x="180101" y="2478100"/>
+            <a:off x="211176" y="2189250"/>
             <a:ext cx="3932400" cy="1665500"/>
           </a:xfrm>
           <a:prstGeom prst="rect">
@@ -7515,8 +7531,12 @@
               <a:buChar char="●"/>
             </a:pPr>
             <a:r>
+              <a:rPr lang="pl"/>
+              <a:t>Wild type ingestion</a:t>
+            </a:r>
+            <a:r>
               <a:rPr b="1" lang="pl"/>
-              <a:t>Wild type ingestion </a:t>
+              <a:t> </a:t>
             </a:r>
             <a:r>
               <a:rPr lang="pl"/>
@@ -7567,27 +7587,6 @@
             <a:r>
               <a:rPr lang="pl"/>
               <a:t>Włączenie outputu z submisji do pętly optymalizacyjnej</a:t>
-            </a:r>
-            <a:endParaRPr/>
-          </a:p>
-          <a:p>
-            <a:pPr indent="-342900" lvl="0" marL="457200" rtl="0" algn="l">
-              <a:spcBef>
-                <a:spcPts val="0"/>
-              </a:spcBef>
-              <a:spcAft>
-                <a:spcPts val="0"/>
-              </a:spcAft>
-              <a:buSzPts val="1800"/>
-              <a:buChar char="●"/>
-            </a:pPr>
-            <a:r>
-              <a:rPr b="1" lang="pl"/>
-              <a:t>Filtry biologiczne</a:t>
-            </a:r>
-            <a:r>
-              <a:rPr lang="pl"/>
-              <a:t>, w tym zbyt podobne do siebie sekwencje powodują obniżenie różnorodności i zatrzymują Nas w minimum</a:t>
             </a:r>
             <a:endParaRPr/>
           </a:p>
@@ -7628,188 +7627,6 @@
         </p:nvSpPr>
         <p:spPr>
           <a:xfrm>
-            <a:off x="311700" y="391350"/>
-            <a:ext cx="8520600" cy="626100"/>
-          </a:xfrm>
-          <a:prstGeom prst="rect">
-            <a:avLst/>
-          </a:prstGeom>
-        </p:spPr>
-        <p:txBody>
-          <a:bodyPr anchorCtr="0" anchor="t" bIns="91425" lIns="91425" spcFirstLastPara="1" rIns="91425" wrap="square" tIns="91425">
-            <a:normAutofit fontScale="90000"/>
-          </a:bodyPr>
-          <a:lstStyle/>
-          <a:p>
-            <a:pPr indent="0" lvl="0" marL="0" rtl="0" algn="l">
-              <a:spcBef>
-                <a:spcPts val="0"/>
-              </a:spcBef>
-              <a:spcAft>
-                <a:spcPts val="0"/>
-              </a:spcAft>
-              <a:buNone/>
-            </a:pPr>
-            <a:r>
-              <a:rPr lang="pl"/>
-              <a:t>Wnioski</a:t>
-            </a:r>
-            <a:endParaRPr/>
-          </a:p>
-        </p:txBody>
-      </p:sp>
-      <p:sp>
-        <p:nvSpPr>
-          <p:cNvPr id="86" name="Google Shape;86;p17"/>
-          <p:cNvSpPr txBox="1"/>
-          <p:nvPr>
-            <p:ph idx="1" type="body"/>
-          </p:nvPr>
-        </p:nvSpPr>
-        <p:spPr>
-          <a:xfrm>
-            <a:off x="311700" y="1152475"/>
-            <a:ext cx="8601900" cy="3416400"/>
-          </a:xfrm>
-          <a:prstGeom prst="rect">
-            <a:avLst/>
-          </a:prstGeom>
-        </p:spPr>
-        <p:txBody>
-          <a:bodyPr anchorCtr="0" anchor="t" bIns="91425" lIns="91425" spcFirstLastPara="1" rIns="91425" wrap="square" tIns="91425">
-            <a:normAutofit/>
-          </a:bodyPr>
-          <a:lstStyle/>
-          <a:p>
-            <a:pPr indent="-361950" lvl="0" marL="457200" rtl="0" algn="l">
-              <a:spcBef>
-                <a:spcPts val="0"/>
-              </a:spcBef>
-              <a:spcAft>
-                <a:spcPts val="0"/>
-              </a:spcAft>
-              <a:buSzPts val="2100"/>
-              <a:buChar char="●"/>
-            </a:pPr>
-            <a:r>
-              <a:rPr lang="pl" sz="2100"/>
-              <a:t>Powinniśmy byli bardziej </a:t>
-            </a:r>
-            <a:r>
-              <a:rPr lang="pl" sz="2100"/>
-              <a:t>zoptymalizować</a:t>
-            </a:r>
-            <a:r>
-              <a:rPr lang="pl" sz="2100"/>
-              <a:t> parametry zanim myśleć o dodatkach</a:t>
-            </a:r>
-            <a:endParaRPr sz="2100"/>
-          </a:p>
-          <a:p>
-            <a:pPr indent="-361950" lvl="0" marL="457200" rtl="0" algn="l">
-              <a:spcBef>
-                <a:spcPts val="0"/>
-              </a:spcBef>
-              <a:spcAft>
-                <a:spcPts val="0"/>
-              </a:spcAft>
-              <a:buSzPts val="2100"/>
-              <a:buChar char="●"/>
-            </a:pPr>
-            <a:r>
-              <a:rPr lang="pl" sz="2100"/>
-              <a:t>Więcej iteracji - lepsza inferencja na zbiorze top 100</a:t>
-            </a:r>
-            <a:endParaRPr sz="2100"/>
-          </a:p>
-          <a:p>
-            <a:pPr indent="-361950" lvl="0" marL="457200" rtl="0" algn="l">
-              <a:spcBef>
-                <a:spcPts val="0"/>
-              </a:spcBef>
-              <a:spcAft>
-                <a:spcPts val="0"/>
-              </a:spcAft>
-              <a:buSzPts val="2100"/>
-              <a:buChar char="●"/>
-            </a:pPr>
-            <a:r>
-              <a:rPr lang="pl" sz="2100"/>
-              <a:t>Uwzględnienie biologicznych filtrów/próbowanie wtasowywania znanych motywów (np. TATA box)</a:t>
-            </a:r>
-            <a:endParaRPr sz="2100"/>
-          </a:p>
-          <a:p>
-            <a:pPr indent="-361950" lvl="0" marL="457200" rtl="0" algn="l">
-              <a:spcBef>
-                <a:spcPts val="0"/>
-              </a:spcBef>
-              <a:spcAft>
-                <a:spcPts val="0"/>
-              </a:spcAft>
-              <a:buSzPts val="2100"/>
-              <a:buChar char="●"/>
-            </a:pPr>
-            <a:r>
-              <a:rPr lang="pl" sz="2100"/>
-              <a:t>Zastosowanie modeli do rozpoznawania sekwencji obecnych w najlepszych promotorach</a:t>
-            </a:r>
-            <a:endParaRPr sz="2100"/>
-          </a:p>
-          <a:p>
-            <a:pPr indent="-361950" lvl="0" marL="457200" rtl="0" algn="l">
-              <a:spcBef>
-                <a:spcPts val="0"/>
-              </a:spcBef>
-              <a:spcAft>
-                <a:spcPts val="0"/>
-              </a:spcAft>
-              <a:buSzPts val="2100"/>
-              <a:buChar char="●"/>
-            </a:pPr>
-            <a:r>
-              <a:rPr lang="pl" sz="2100"/>
-              <a:t>Więcej spania i spacer po obiedzie 🥀🥀🥀🥀</a:t>
-            </a:r>
-            <a:endParaRPr sz="2100"/>
-          </a:p>
-        </p:txBody>
-      </p:sp>
-    </p:spTree>
-  </p:cSld>
-  <p:clrMapOvr>
-    <a:masterClrMapping/>
-  </p:clrMapOvr>
-</p:sld>
-</file>
-
-<file path=ppt/slides/slide6.xml><?xml version="1.0" encoding="utf-8"?>
-<p:sld xmlns:a="http://schemas.openxmlformats.org/drawingml/2006/main" xmlns:r="http://schemas.openxmlformats.org/officeDocument/2006/relationships" xmlns:mc="http://schemas.openxmlformats.org/markup-compatibility/2006" xmlns:mv="urn:schemas-microsoft-com:mac:vml" xmlns:p="http://schemas.openxmlformats.org/presentationml/2006/main" xmlns:c="http://schemas.openxmlformats.org/drawingml/2006/chart" xmlns:dgm="http://schemas.openxmlformats.org/drawingml/2006/diagram" xmlns:o="urn:schemas-microsoft-com:office:office" xmlns:v="urn:schemas-microsoft-com:vml" xmlns:pvml="urn:schemas-microsoft-com:office:powerpoint" xmlns:com="http://schemas.openxmlformats.org/drawingml/2006/compatibility" xmlns:p14="http://schemas.microsoft.com/office/powerpoint/2010/main" xmlns:p15="http://schemas.microsoft.com/office/powerpoint/2012/main" xmlns:ahyp="http://schemas.microsoft.com/office/drawing/2018/hyperlinkcolor">
-  <p:cSld>
-    <p:spTree>
-      <p:nvGrpSpPr>
-        <p:cNvPr id="90" name="Shape 90"/>
-        <p:cNvGrpSpPr/>
-        <p:nvPr/>
-      </p:nvGrpSpPr>
-      <p:grpSpPr>
-        <a:xfrm>
-          <a:off x="0" y="0"/>
-          <a:ext cx="0" cy="0"/>
-          <a:chOff x="0" y="0"/>
-          <a:chExt cx="0" cy="0"/>
-        </a:xfrm>
-      </p:grpSpPr>
-      <p:sp>
-        <p:nvSpPr>
-          <p:cNvPr id="91" name="Google Shape;91;p18"/>
-          <p:cNvSpPr txBox="1"/>
-          <p:nvPr>
-            <p:ph type="title"/>
-          </p:nvPr>
-        </p:nvSpPr>
-        <p:spPr>
-          <a:xfrm>
             <a:off x="139325" y="248375"/>
             <a:ext cx="8520600" cy="626100"/>
           </a:xfrm>
@@ -7842,7 +7659,7 @@
       </p:sp>
       <p:pic>
         <p:nvPicPr>
-          <p:cNvPr id="92" name="Google Shape;92;p18"/>
+          <p:cNvPr id="86" name="Google Shape;86;p17"/>
           <p:cNvPicPr preferRelativeResize="0"/>
           <p:nvPr/>
         </p:nvPicPr>
@@ -7870,7 +7687,7 @@
       </p:pic>
       <p:grpSp>
         <p:nvGrpSpPr>
-          <p:cNvPr id="93" name="Google Shape;93;p18"/>
+          <p:cNvPr id="87" name="Google Shape;87;p17"/>
           <p:cNvGrpSpPr/>
           <p:nvPr/>
         </p:nvGrpSpPr>
@@ -7884,7 +7701,7 @@
         </p:grpSpPr>
         <p:pic>
           <p:nvPicPr>
-            <p:cNvPr id="94" name="Google Shape;94;p18"/>
+            <p:cNvPr id="88" name="Google Shape;88;p17"/>
             <p:cNvPicPr preferRelativeResize="0"/>
             <p:nvPr/>
           </p:nvPicPr>
@@ -7912,7 +7729,7 @@
         </p:pic>
         <p:cxnSp>
           <p:nvCxnSpPr>
-            <p:cNvPr id="95" name="Google Shape;95;p18"/>
+            <p:cNvPr id="89" name="Google Shape;89;p17"/>
             <p:cNvCxnSpPr/>
             <p:nvPr/>
           </p:nvCxnSpPr>
@@ -7938,7 +7755,7 @@
         </p:cxnSp>
         <p:cxnSp>
           <p:nvCxnSpPr>
-            <p:cNvPr id="96" name="Google Shape;96;p18"/>
+            <p:cNvPr id="90" name="Google Shape;90;p17"/>
             <p:cNvCxnSpPr/>
             <p:nvPr/>
           </p:nvCxnSpPr>
@@ -7964,7 +7781,7 @@
         </p:cxnSp>
         <p:cxnSp>
           <p:nvCxnSpPr>
-            <p:cNvPr id="97" name="Google Shape;97;p18"/>
+            <p:cNvPr id="91" name="Google Shape;91;p17"/>
             <p:cNvCxnSpPr/>
             <p:nvPr/>
           </p:nvCxnSpPr>
@@ -7990,7 +7807,7 @@
         </p:cxnSp>
         <p:cxnSp>
           <p:nvCxnSpPr>
-            <p:cNvPr id="98" name="Google Shape;98;p18"/>
+            <p:cNvPr id="92" name="Google Shape;92;p17"/>
             <p:cNvCxnSpPr/>
             <p:nvPr/>
           </p:nvCxnSpPr>
@@ -8016,7 +7833,7 @@
         </p:cxnSp>
         <p:pic>
           <p:nvPicPr>
-            <p:cNvPr id="99" name="Google Shape;99;p18"/>
+            <p:cNvPr id="93" name="Google Shape;93;p17"/>
             <p:cNvPicPr preferRelativeResize="0"/>
             <p:nvPr/>
           </p:nvPicPr>
@@ -8045,7 +7862,7 @@
       </p:grpSp>
       <p:pic>
         <p:nvPicPr>
-          <p:cNvPr id="100" name="Google Shape;100;p18"/>
+          <p:cNvPr id="94" name="Google Shape;94;p17"/>
           <p:cNvPicPr preferRelativeResize="0"/>
           <p:nvPr/>
         </p:nvPicPr>
@@ -8071,6 +7888,216 @@
           </a:ln>
         </p:spPr>
       </p:pic>
+      <p:pic>
+        <p:nvPicPr>
+          <p:cNvPr id="95" name="Google Shape;95;p17"/>
+          <p:cNvPicPr preferRelativeResize="0"/>
+          <p:nvPr/>
+        </p:nvPicPr>
+        <p:blipFill>
+          <a:blip r:embed="rId7">
+            <a:alphaModFix/>
+          </a:blip>
+          <a:stretch>
+            <a:fillRect/>
+          </a:stretch>
+        </p:blipFill>
+        <p:spPr>
+          <a:xfrm>
+            <a:off x="6057323" y="2806650"/>
+            <a:ext cx="2202671" cy="1652401"/>
+          </a:xfrm>
+          <a:prstGeom prst="rect">
+            <a:avLst/>
+          </a:prstGeom>
+          <a:noFill/>
+          <a:ln>
+            <a:noFill/>
+          </a:ln>
+        </p:spPr>
+      </p:pic>
+    </p:spTree>
+  </p:cSld>
+  <p:clrMapOvr>
+    <a:masterClrMapping/>
+  </p:clrMapOvr>
+</p:sld>
+</file>
+
+<file path=ppt/slides/slide6.xml><?xml version="1.0" encoding="utf-8"?>
+<p:sld xmlns:a="http://schemas.openxmlformats.org/drawingml/2006/main" xmlns:r="http://schemas.openxmlformats.org/officeDocument/2006/relationships" xmlns:mc="http://schemas.openxmlformats.org/markup-compatibility/2006" xmlns:mv="urn:schemas-microsoft-com:mac:vml" xmlns:p="http://schemas.openxmlformats.org/presentationml/2006/main" xmlns:c="http://schemas.openxmlformats.org/drawingml/2006/chart" xmlns:dgm="http://schemas.openxmlformats.org/drawingml/2006/diagram" xmlns:o="urn:schemas-microsoft-com:office:office" xmlns:v="urn:schemas-microsoft-com:vml" xmlns:pvml="urn:schemas-microsoft-com:office:powerpoint" xmlns:com="http://schemas.openxmlformats.org/drawingml/2006/compatibility" xmlns:p14="http://schemas.microsoft.com/office/powerpoint/2010/main" xmlns:p15="http://schemas.microsoft.com/office/powerpoint/2012/main" xmlns:ahyp="http://schemas.microsoft.com/office/drawing/2018/hyperlinkcolor">
+  <p:cSld>
+    <p:spTree>
+      <p:nvGrpSpPr>
+        <p:cNvPr id="99" name="Shape 99"/>
+        <p:cNvGrpSpPr/>
+        <p:nvPr/>
+      </p:nvGrpSpPr>
+      <p:grpSpPr>
+        <a:xfrm>
+          <a:off x="0" y="0"/>
+          <a:ext cx="0" cy="0"/>
+          <a:chOff x="0" y="0"/>
+          <a:chExt cx="0" cy="0"/>
+        </a:xfrm>
+      </p:grpSpPr>
+      <p:sp>
+        <p:nvSpPr>
+          <p:cNvPr id="100" name="Google Shape;100;p18"/>
+          <p:cNvSpPr txBox="1"/>
+          <p:nvPr>
+            <p:ph type="title"/>
+          </p:nvPr>
+        </p:nvSpPr>
+        <p:spPr>
+          <a:xfrm>
+            <a:off x="311700" y="391350"/>
+            <a:ext cx="8520600" cy="626100"/>
+          </a:xfrm>
+          <a:prstGeom prst="rect">
+            <a:avLst/>
+          </a:prstGeom>
+        </p:spPr>
+        <p:txBody>
+          <a:bodyPr anchorCtr="0" anchor="t" bIns="91425" lIns="91425" spcFirstLastPara="1" rIns="91425" wrap="square" tIns="91425">
+            <a:normAutofit fontScale="90000"/>
+          </a:bodyPr>
+          <a:lstStyle/>
+          <a:p>
+            <a:pPr indent="0" lvl="0" marL="0" rtl="0" algn="l">
+              <a:spcBef>
+                <a:spcPts val="0"/>
+              </a:spcBef>
+              <a:spcAft>
+                <a:spcPts val="0"/>
+              </a:spcAft>
+              <a:buNone/>
+            </a:pPr>
+            <a:r>
+              <a:rPr lang="pl"/>
+              <a:t>Wnioski</a:t>
+            </a:r>
+            <a:endParaRPr/>
+          </a:p>
+        </p:txBody>
+      </p:sp>
+      <p:sp>
+        <p:nvSpPr>
+          <p:cNvPr id="101" name="Google Shape;101;p18"/>
+          <p:cNvSpPr txBox="1"/>
+          <p:nvPr>
+            <p:ph idx="1" type="body"/>
+          </p:nvPr>
+        </p:nvSpPr>
+        <p:spPr>
+          <a:xfrm>
+            <a:off x="311700" y="1152475"/>
+            <a:ext cx="8601900" cy="3416400"/>
+          </a:xfrm>
+          <a:prstGeom prst="rect">
+            <a:avLst/>
+          </a:prstGeom>
+        </p:spPr>
+        <p:txBody>
+          <a:bodyPr anchorCtr="0" anchor="t" bIns="91425" lIns="91425" spcFirstLastPara="1" rIns="91425" wrap="square" tIns="91425">
+            <a:normAutofit/>
+          </a:bodyPr>
+          <a:lstStyle/>
+          <a:p>
+            <a:pPr indent="-361950" lvl="0" marL="457200" rtl="0" algn="l">
+              <a:spcBef>
+                <a:spcPts val="0"/>
+              </a:spcBef>
+              <a:spcAft>
+                <a:spcPts val="0"/>
+              </a:spcAft>
+              <a:buSzPts val="2100"/>
+              <a:buChar char="●"/>
+            </a:pPr>
+            <a:r>
+              <a:rPr lang="pl" sz="2100"/>
+              <a:t>Powinniśmy byli bardziej </a:t>
+            </a:r>
+            <a:r>
+              <a:rPr lang="pl" sz="2100"/>
+              <a:t>zoptymalizować</a:t>
+            </a:r>
+            <a:r>
+              <a:rPr lang="pl" sz="2100"/>
+              <a:t> parametry zanim myśleć o dodatkach</a:t>
+            </a:r>
+            <a:endParaRPr sz="2100"/>
+          </a:p>
+          <a:p>
+            <a:pPr indent="-361950" lvl="0" marL="457200" rtl="0" algn="l">
+              <a:spcBef>
+                <a:spcPts val="0"/>
+              </a:spcBef>
+              <a:spcAft>
+                <a:spcPts val="0"/>
+              </a:spcAft>
+              <a:buSzPts val="2100"/>
+              <a:buChar char="●"/>
+            </a:pPr>
+            <a:r>
+              <a:rPr lang="pl" sz="2100"/>
+              <a:t>Więcej iteracji - lepsza inferencja na zbiorze top 100</a:t>
+            </a:r>
+            <a:endParaRPr sz="2100"/>
+          </a:p>
+          <a:p>
+            <a:pPr indent="-361950" lvl="0" marL="457200" rtl="0" algn="l">
+              <a:spcBef>
+                <a:spcPts val="0"/>
+              </a:spcBef>
+              <a:spcAft>
+                <a:spcPts val="0"/>
+              </a:spcAft>
+              <a:buSzPts val="2100"/>
+              <a:buChar char="●"/>
+            </a:pPr>
+            <a:r>
+              <a:rPr lang="pl" sz="2100"/>
+              <a:t>Uwzględnienie biologicznych filtrów/próbowanie wtasowywania znanych motywów (np. TATA box)</a:t>
+            </a:r>
+            <a:endParaRPr sz="2100"/>
+          </a:p>
+          <a:p>
+            <a:pPr indent="-361950" lvl="0" marL="457200" rtl="0" algn="l">
+              <a:spcBef>
+                <a:spcPts val="0"/>
+              </a:spcBef>
+              <a:spcAft>
+                <a:spcPts val="0"/>
+              </a:spcAft>
+              <a:buSzPts val="2100"/>
+              <a:buChar char="●"/>
+            </a:pPr>
+            <a:r>
+              <a:rPr lang="pl" sz="2100"/>
+              <a:t>Zastosowanie modeli do rozpoznawania sekwencji obecnych w najlepszych promotorach</a:t>
+            </a:r>
+            <a:endParaRPr sz="2100"/>
+          </a:p>
+          <a:p>
+            <a:pPr indent="-361950" lvl="0" marL="457200" rtl="0" algn="l">
+              <a:spcBef>
+                <a:spcPts val="0"/>
+              </a:spcBef>
+              <a:spcAft>
+                <a:spcPts val="0"/>
+              </a:spcAft>
+              <a:buSzPts val="2100"/>
+              <a:buChar char="●"/>
+            </a:pPr>
+            <a:r>
+              <a:rPr lang="pl" sz="2100"/>
+              <a:t>Więcej spania i spacer po obiedzie 🥀🥀🥀🥀</a:t>
+            </a:r>
+            <a:endParaRPr sz="2100"/>
+          </a:p>
+        </p:txBody>
+      </p:sp>
     </p:spTree>
   </p:cSld>
   <p:clrMapOvr>
@@ -8084,7 +8111,7 @@
   <p:cSld>
     <p:spTree>
       <p:nvGrpSpPr>
-        <p:cNvPr id="104" name="Shape 104"/>
+        <p:cNvPr id="105" name="Shape 105"/>
         <p:cNvGrpSpPr/>
         <p:nvPr/>
       </p:nvGrpSpPr>
@@ -8098,7 +8125,7 @@
       </p:grpSpPr>
       <p:sp>
         <p:nvSpPr>
-          <p:cNvPr id="105" name="Google Shape;105;p19"/>
+          <p:cNvPr id="106" name="Google Shape;106;p19"/>
           <p:cNvSpPr/>
           <p:nvPr/>
         </p:nvSpPr>
@@ -8152,7 +8179,7 @@
       </p:sp>
       <p:sp>
         <p:nvSpPr>
-          <p:cNvPr id="106" name="Google Shape;106;p19"/>
+          <p:cNvPr id="107" name="Google Shape;107;p19"/>
           <p:cNvSpPr txBox="1"/>
           <p:nvPr>
             <p:ph type="title"/>
@@ -8193,7 +8220,7 @@
       </p:sp>
       <p:sp>
         <p:nvSpPr>
-          <p:cNvPr id="107" name="Google Shape;107;p19"/>
+          <p:cNvPr id="108" name="Google Shape;108;p19"/>
           <p:cNvSpPr txBox="1"/>
           <p:nvPr>
             <p:ph idx="1" type="body"/>
@@ -8233,7 +8260,7 @@
       </p:sp>
       <p:pic>
         <p:nvPicPr>
-          <p:cNvPr id="108" name="Google Shape;108;p19"/>
+          <p:cNvPr id="109" name="Google Shape;109;p19"/>
           <p:cNvPicPr preferRelativeResize="0"/>
           <p:nvPr/>
         </p:nvPicPr>
@@ -8268,6 +8295,285 @@
 </file>
 
 <file path=ppt/theme/theme1.xml><?xml version="1.0" encoding="utf-8"?>
+<a:theme xmlns:a="http://schemas.openxmlformats.org/drawingml/2006/main" xmlns:r="http://schemas.openxmlformats.org/officeDocument/2006/relationships" name="Coral">
+  <a:themeElements>
+    <a:clrScheme name="Coral">
+      <a:dk1>
+        <a:srgbClr val="F55E61"/>
+      </a:dk1>
+      <a:lt1>
+        <a:srgbClr val="FFFFFF"/>
+      </a:lt1>
+      <a:dk2>
+        <a:srgbClr val="5E696C"/>
+      </a:dk2>
+      <a:lt2>
+        <a:srgbClr val="BFC7CA"/>
+      </a:lt2>
+      <a:accent1>
+        <a:srgbClr val="1E2D31"/>
+      </a:accent1>
+      <a:accent2>
+        <a:srgbClr val="273C42"/>
+      </a:accent2>
+      <a:accent3>
+        <a:srgbClr val="83D061"/>
+      </a:accent3>
+      <a:accent4>
+        <a:srgbClr val="F6CD4C"/>
+      </a:accent4>
+      <a:accent5>
+        <a:srgbClr val="AF4345"/>
+      </a:accent5>
+      <a:accent6>
+        <a:srgbClr val="F58F8F"/>
+      </a:accent6>
+      <a:hlink>
+        <a:srgbClr val="AF4345"/>
+      </a:hlink>
+      <a:folHlink>
+        <a:srgbClr val="AF4345"/>
+      </a:folHlink>
+    </a:clrScheme>
+    <a:fontScheme name="Office">
+      <a:majorFont>
+        <a:latin typeface="Arial"/>
+        <a:ea typeface=""/>
+        <a:cs typeface=""/>
+        <a:font script="Jpan" typeface="ＭＳ Ｐゴシック"/>
+        <a:font script="Hang" typeface="맑은 고딕"/>
+        <a:font script="Hans" typeface="宋体"/>
+        <a:font script="Hant" typeface="新細明體"/>
+        <a:font script="Arab" typeface="Times New Roman"/>
+        <a:font script="Hebr" typeface="Times New Roman"/>
+        <a:font script="Thai" typeface="Angsana New"/>
+        <a:font script="Ethi" typeface="Nyala"/>
+        <a:font script="Beng" typeface="Vrinda"/>
+        <a:font script="Gujr" typeface="Shruti"/>
+        <a:font script="Khmr" typeface="MoolBoran"/>
+        <a:font script="Knda" typeface="Tunga"/>
+        <a:font script="Guru" typeface="Raavi"/>
+        <a:font script="Cans" typeface="Euphemia"/>
+        <a:font script="Cher" typeface="Plantagenet Cherokee"/>
+        <a:font script="Yiii" typeface="Microsoft Yi Baiti"/>
+        <a:font script="Tibt" typeface="Microsoft Himalaya"/>
+        <a:font script="Thaa" typeface="MV Boli"/>
+        <a:font script="Deva" typeface="Mangal"/>
+        <a:font script="Telu" typeface="Gautami"/>
+        <a:font script="Taml" typeface="Latha"/>
+        <a:font script="Syrc" typeface="Estrangelo Edessa"/>
+        <a:font script="Orya" typeface="Kalinga"/>
+        <a:font script="Mlym" typeface="Kartika"/>
+        <a:font script="Laoo" typeface="DokChampa"/>
+        <a:font script="Sinh" typeface="Iskoola Pota"/>
+        <a:font script="Mong" typeface="Mongolian Baiti"/>
+        <a:font script="Viet" typeface="Times New Roman"/>
+        <a:font script="Uigh" typeface="Microsoft Uighur"/>
+        <a:font script="Geor" typeface="Sylfaen"/>
+      </a:majorFont>
+      <a:minorFont>
+        <a:latin typeface="Arial"/>
+        <a:ea typeface=""/>
+        <a:cs typeface=""/>
+        <a:font script="Jpan" typeface="ＭＳ Ｐゴシック"/>
+        <a:font script="Hang" typeface="맑은 고딕"/>
+        <a:font script="Hans" typeface="宋体"/>
+        <a:font script="Hant" typeface="新細明體"/>
+        <a:font script="Arab" typeface="Arial"/>
+        <a:font script="Hebr" typeface="Arial"/>
+        <a:font script="Thai" typeface="Cordia New"/>
+        <a:font script="Ethi" typeface="Nyala"/>
+        <a:font script="Beng" typeface="Vrinda"/>
+        <a:font script="Gujr" typeface="Shruti"/>
+        <a:font script="Khmr" typeface="DaunPenh"/>
+        <a:font script="Knda" typeface="Tunga"/>
+        <a:font script="Guru" typeface="Raavi"/>
+        <a:font script="Cans" typeface="Euphemia"/>
+        <a:font script="Cher" typeface="Plantagenet Cherokee"/>
+        <a:font script="Yiii" typeface="Microsoft Yi Baiti"/>
+        <a:font script="Tibt" typeface="Microsoft Himalaya"/>
+        <a:font script="Thaa" typeface="MV Boli"/>
+        <a:font script="Deva" typeface="Mangal"/>
+        <a:font script="Telu" typeface="Gautami"/>
+        <a:font script="Taml" typeface="Latha"/>
+        <a:font script="Syrc" typeface="Estrangelo Edessa"/>
+        <a:font script="Orya" typeface="Kalinga"/>
+        <a:font script="Mlym" typeface="Kartika"/>
+        <a:font script="Laoo" typeface="DokChampa"/>
+        <a:font script="Sinh" typeface="Iskoola Pota"/>
+        <a:font script="Mong" typeface="Mongolian Baiti"/>
+        <a:font script="Viet" typeface="Arial"/>
+        <a:font script="Uigh" typeface="Microsoft Uighur"/>
+        <a:font script="Geor" typeface="Sylfaen"/>
+      </a:minorFont>
+    </a:fontScheme>
+    <a:fmtScheme name="Office">
+      <a:fillStyleLst>
+        <a:solidFill>
+          <a:schemeClr val="phClr"/>
+        </a:solidFill>
+        <a:gradFill rotWithShape="1">
+          <a:gsLst>
+            <a:gs pos="0">
+              <a:schemeClr val="phClr">
+                <a:tint val="50000"/>
+                <a:satMod val="300000"/>
+              </a:schemeClr>
+            </a:gs>
+            <a:gs pos="35000">
+              <a:schemeClr val="phClr">
+                <a:tint val="37000"/>
+                <a:satMod val="300000"/>
+              </a:schemeClr>
+            </a:gs>
+            <a:gs pos="100000">
+              <a:schemeClr val="phClr">
+                <a:tint val="15000"/>
+                <a:satMod val="350000"/>
+              </a:schemeClr>
+            </a:gs>
+          </a:gsLst>
+          <a:lin ang="16200000" scaled="1"/>
+        </a:gradFill>
+        <a:gradFill rotWithShape="1">
+          <a:gsLst>
+            <a:gs pos="0">
+              <a:schemeClr val="phClr">
+                <a:tint val="100000"/>
+                <a:shade val="100000"/>
+                <a:satMod val="130000"/>
+              </a:schemeClr>
+            </a:gs>
+            <a:gs pos="100000">
+              <a:schemeClr val="phClr">
+                <a:tint val="50000"/>
+                <a:shade val="100000"/>
+                <a:satMod val="350000"/>
+              </a:schemeClr>
+            </a:gs>
+          </a:gsLst>
+          <a:lin ang="16200000" scaled="0"/>
+        </a:gradFill>
+      </a:fillStyleLst>
+      <a:lnStyleLst>
+        <a:ln w="9525" cap="flat" cmpd="sng" algn="ctr">
+          <a:solidFill>
+            <a:schemeClr val="phClr">
+              <a:shade val="95000"/>
+              <a:satMod val="105000"/>
+            </a:schemeClr>
+          </a:solidFill>
+          <a:prstDash val="solid"/>
+        </a:ln>
+        <a:ln w="25400" cap="flat" cmpd="sng" algn="ctr">
+          <a:solidFill>
+            <a:schemeClr val="phClr"/>
+          </a:solidFill>
+          <a:prstDash val="solid"/>
+        </a:ln>
+        <a:ln w="38100" cap="flat" cmpd="sng" algn="ctr">
+          <a:solidFill>
+            <a:schemeClr val="phClr"/>
+          </a:solidFill>
+          <a:prstDash val="solid"/>
+        </a:ln>
+      </a:lnStyleLst>
+      <a:effectStyleLst>
+        <a:effectStyle>
+          <a:effectLst>
+            <a:outerShdw blurRad="40000" dist="20000" dir="5400000" rotWithShape="0">
+              <a:srgbClr val="000000">
+                <a:alpha val="38000"/>
+              </a:srgbClr>
+            </a:outerShdw>
+          </a:effectLst>
+        </a:effectStyle>
+        <a:effectStyle>
+          <a:effectLst>
+            <a:outerShdw blurRad="40000" dist="23000" dir="5400000" rotWithShape="0">
+              <a:srgbClr val="000000">
+                <a:alpha val="35000"/>
+              </a:srgbClr>
+            </a:outerShdw>
+          </a:effectLst>
+        </a:effectStyle>
+        <a:effectStyle>
+          <a:effectLst>
+            <a:outerShdw blurRad="40000" dist="23000" dir="5400000" rotWithShape="0">
+              <a:srgbClr val="000000">
+                <a:alpha val="35000"/>
+              </a:srgbClr>
+            </a:outerShdw>
+          </a:effectLst>
+          <a:scene3d>
+            <a:camera prst="orthographicFront">
+              <a:rot lat="0" lon="0" rev="0"/>
+            </a:camera>
+            <a:lightRig rig="threePt" dir="t">
+              <a:rot lat="0" lon="0" rev="1200000"/>
+            </a:lightRig>
+          </a:scene3d>
+          <a:sp3d>
+            <a:bevelT w="63500" h="25400"/>
+          </a:sp3d>
+        </a:effectStyle>
+      </a:effectStyleLst>
+      <a:bgFillStyleLst>
+        <a:solidFill>
+          <a:schemeClr val="phClr"/>
+        </a:solidFill>
+        <a:gradFill rotWithShape="1">
+          <a:gsLst>
+            <a:gs pos="0">
+              <a:schemeClr val="phClr">
+                <a:tint val="40000"/>
+                <a:satMod val="350000"/>
+              </a:schemeClr>
+            </a:gs>
+            <a:gs pos="40000">
+              <a:schemeClr val="phClr">
+                <a:tint val="45000"/>
+                <a:shade val="99000"/>
+                <a:satMod val="350000"/>
+              </a:schemeClr>
+            </a:gs>
+            <a:gs pos="100000">
+              <a:schemeClr val="phClr">
+                <a:shade val="20000"/>
+                <a:satMod val="255000"/>
+              </a:schemeClr>
+            </a:gs>
+          </a:gsLst>
+          <a:path path="circle">
+            <a:fillToRect l="50000" t="-80000" r="50000" b="180000"/>
+          </a:path>
+        </a:gradFill>
+        <a:gradFill rotWithShape="1">
+          <a:gsLst>
+            <a:gs pos="0">
+              <a:schemeClr val="phClr">
+                <a:tint val="80000"/>
+                <a:satMod val="300000"/>
+              </a:schemeClr>
+            </a:gs>
+            <a:gs pos="100000">
+              <a:schemeClr val="phClr">
+                <a:shade val="30000"/>
+                <a:satMod val="200000"/>
+              </a:schemeClr>
+            </a:gs>
+          </a:gsLst>
+          <a:path path="circle">
+            <a:fillToRect l="50000" t="50000" r="50000" b="50000"/>
+          </a:path>
+        </a:gradFill>
+      </a:bgFillStyleLst>
+    </a:fmtScheme>
+  </a:themeElements>
+</a:theme>
+</file>
+
+<file path=ppt/theme/theme2.xml><?xml version="1.0" encoding="utf-8"?>
 <a:theme xmlns:a="http://schemas.openxmlformats.org/drawingml/2006/main" xmlns:r="http://schemas.openxmlformats.org/officeDocument/2006/relationships">
   <a:themeElements>
     <a:clrScheme name="Default">
@@ -8544,283 +8850,4 @@
     </a:fmtScheme>
   </a:themeElements>
 </a:theme>
-</file>
-
-<file path=ppt/theme/theme2.xml><?xml version="1.0" encoding="utf-8"?>
-<a:theme xmlns:a="http://schemas.openxmlformats.org/drawingml/2006/main" xmlns:r="http://schemas.openxmlformats.org/officeDocument/2006/relationships" name="Coral">
-  <a:themeElements>
-    <a:clrScheme name="Coral">
-      <a:dk1>
-        <a:srgbClr val="F55E61"/>
-      </a:dk1>
-      <a:lt1>
-        <a:srgbClr val="FFFFFF"/>
-      </a:lt1>
-      <a:dk2>
-        <a:srgbClr val="5E696C"/>
-      </a:dk2>
-      <a:lt2>
-        <a:srgbClr val="BFC7CA"/>
-      </a:lt2>
-      <a:accent1>
-        <a:srgbClr val="1E2D31"/>
-      </a:accent1>
-      <a:accent2>
-        <a:srgbClr val="273C42"/>
-      </a:accent2>
-      <a:accent3>
-        <a:srgbClr val="83D061"/>
-      </a:accent3>
-      <a:accent4>
-        <a:srgbClr val="F6CD4C"/>
-      </a:accent4>
-      <a:accent5>
-        <a:srgbClr val="AF4345"/>
-      </a:accent5>
-      <a:accent6>
-        <a:srgbClr val="F58F8F"/>
-      </a:accent6>
-      <a:hlink>
-        <a:srgbClr val="AF4345"/>
-      </a:hlink>
-      <a:folHlink>
-        <a:srgbClr val="AF4345"/>
-      </a:folHlink>
-    </a:clrScheme>
-    <a:fontScheme name="Office">
-      <a:majorFont>
-        <a:latin typeface="Arial"/>
-        <a:ea typeface=""/>
-        <a:cs typeface=""/>
-        <a:font script="Jpan" typeface="ＭＳ Ｐゴシック"/>
-        <a:font script="Hang" typeface="맑은 고딕"/>
-        <a:font script="Hans" typeface="宋体"/>
-        <a:font script="Hant" typeface="新細明體"/>
-        <a:font script="Arab" typeface="Times New Roman"/>
-        <a:font script="Hebr" typeface="Times New Roman"/>
-        <a:font script="Thai" typeface="Angsana New"/>
-        <a:font script="Ethi" typeface="Nyala"/>
-        <a:font script="Beng" typeface="Vrinda"/>
-        <a:font script="Gujr" typeface="Shruti"/>
-        <a:font script="Khmr" typeface="MoolBoran"/>
-        <a:font script="Knda" typeface="Tunga"/>
-        <a:font script="Guru" typeface="Raavi"/>
-        <a:font script="Cans" typeface="Euphemia"/>
-        <a:font script="Cher" typeface="Plantagenet Cherokee"/>
-        <a:font script="Yiii" typeface="Microsoft Yi Baiti"/>
-        <a:font script="Tibt" typeface="Microsoft Himalaya"/>
-        <a:font script="Thaa" typeface="MV Boli"/>
-        <a:font script="Deva" typeface="Mangal"/>
-        <a:font script="Telu" typeface="Gautami"/>
-        <a:font script="Taml" typeface="Latha"/>
-        <a:font script="Syrc" typeface="Estrangelo Edessa"/>
-        <a:font script="Orya" typeface="Kalinga"/>
-        <a:font script="Mlym" typeface="Kartika"/>
-        <a:font script="Laoo" typeface="DokChampa"/>
-        <a:font script="Sinh" typeface="Iskoola Pota"/>
-        <a:font script="Mong" typeface="Mongolian Baiti"/>
-        <a:font script="Viet" typeface="Times New Roman"/>
-        <a:font script="Uigh" typeface="Microsoft Uighur"/>
-        <a:font script="Geor" typeface="Sylfaen"/>
-      </a:majorFont>
-      <a:minorFont>
-        <a:latin typeface="Arial"/>
-        <a:ea typeface=""/>
-        <a:cs typeface=""/>
-        <a:font script="Jpan" typeface="ＭＳ Ｐゴシック"/>
-        <a:font script="Hang" typeface="맑은 고딕"/>
-        <a:font script="Hans" typeface="宋体"/>
-        <a:font script="Hant" typeface="新細明體"/>
-        <a:font script="Arab" typeface="Arial"/>
-        <a:font script="Hebr" typeface="Arial"/>
-        <a:font script="Thai" typeface="Cordia New"/>
-        <a:font script="Ethi" typeface="Nyala"/>
-        <a:font script="Beng" typeface="Vrinda"/>
-        <a:font script="Gujr" typeface="Shruti"/>
-        <a:font script="Khmr" typeface="DaunPenh"/>
-        <a:font script="Knda" typeface="Tunga"/>
-        <a:font script="Guru" typeface="Raavi"/>
-        <a:font script="Cans" typeface="Euphemia"/>
-        <a:font script="Cher" typeface="Plantagenet Cherokee"/>
-        <a:font script="Yiii" typeface="Microsoft Yi Baiti"/>
-        <a:font script="Tibt" typeface="Microsoft Himalaya"/>
-        <a:font script="Thaa" typeface="MV Boli"/>
-        <a:font script="Deva" typeface="Mangal"/>
-        <a:font script="Telu" typeface="Gautami"/>
-        <a:font script="Taml" typeface="Latha"/>
-        <a:font script="Syrc" typeface="Estrangelo Edessa"/>
-        <a:font script="Orya" typeface="Kalinga"/>
-        <a:font script="Mlym" typeface="Kartika"/>
-        <a:font script="Laoo" typeface="DokChampa"/>
-        <a:font script="Sinh" typeface="Iskoola Pota"/>
-        <a:font script="Mong" typeface="Mongolian Baiti"/>
-        <a:font script="Viet" typeface="Arial"/>
-        <a:font script="Uigh" typeface="Microsoft Uighur"/>
-        <a:font script="Geor" typeface="Sylfaen"/>
-      </a:minorFont>
-    </a:fontScheme>
-    <a:fmtScheme name="Office">
-      <a:fillStyleLst>
-        <a:solidFill>
-          <a:schemeClr val="phClr"/>
-        </a:solidFill>
-        <a:gradFill rotWithShape="1">
-          <a:gsLst>
-            <a:gs pos="0">
-              <a:schemeClr val="phClr">
-                <a:tint val="50000"/>
-                <a:satMod val="300000"/>
-              </a:schemeClr>
-            </a:gs>
-            <a:gs pos="35000">
-              <a:schemeClr val="phClr">
-                <a:tint val="37000"/>
-                <a:satMod val="300000"/>
-              </a:schemeClr>
-            </a:gs>
-            <a:gs pos="100000">
-              <a:schemeClr val="phClr">
-                <a:tint val="15000"/>
-                <a:satMod val="350000"/>
-              </a:schemeClr>
-            </a:gs>
-          </a:gsLst>
-          <a:lin ang="16200000" scaled="1"/>
-        </a:gradFill>
-        <a:gradFill rotWithShape="1">
-          <a:gsLst>
-            <a:gs pos="0">
-              <a:schemeClr val="phClr">
-                <a:tint val="100000"/>
-                <a:shade val="100000"/>
-                <a:satMod val="130000"/>
-              </a:schemeClr>
-            </a:gs>
-            <a:gs pos="100000">
-              <a:schemeClr val="phClr">
-                <a:tint val="50000"/>
-                <a:shade val="100000"/>
-                <a:satMod val="350000"/>
-              </a:schemeClr>
-            </a:gs>
-          </a:gsLst>
-          <a:lin ang="16200000" scaled="0"/>
-        </a:gradFill>
-      </a:fillStyleLst>
-      <a:lnStyleLst>
-        <a:ln w="9525" cap="flat" cmpd="sng" algn="ctr">
-          <a:solidFill>
-            <a:schemeClr val="phClr">
-              <a:shade val="95000"/>
-              <a:satMod val="105000"/>
-            </a:schemeClr>
-          </a:solidFill>
-          <a:prstDash val="solid"/>
-        </a:ln>
-        <a:ln w="25400" cap="flat" cmpd="sng" algn="ctr">
-          <a:solidFill>
-            <a:schemeClr val="phClr"/>
-          </a:solidFill>
-          <a:prstDash val="solid"/>
-        </a:ln>
-        <a:ln w="38100" cap="flat" cmpd="sng" algn="ctr">
-          <a:solidFill>
-            <a:schemeClr val="phClr"/>
-          </a:solidFill>
-          <a:prstDash val="solid"/>
-        </a:ln>
-      </a:lnStyleLst>
-      <a:effectStyleLst>
-        <a:effectStyle>
-          <a:effectLst>
-            <a:outerShdw blurRad="40000" dist="20000" dir="5400000" rotWithShape="0">
-              <a:srgbClr val="000000">
-                <a:alpha val="38000"/>
-              </a:srgbClr>
-            </a:outerShdw>
-          </a:effectLst>
-        </a:effectStyle>
-        <a:effectStyle>
-          <a:effectLst>
-            <a:outerShdw blurRad="40000" dist="23000" dir="5400000" rotWithShape="0">
-              <a:srgbClr val="000000">
-                <a:alpha val="35000"/>
-              </a:srgbClr>
-            </a:outerShdw>
-          </a:effectLst>
-        </a:effectStyle>
-        <a:effectStyle>
-          <a:effectLst>
-            <a:outerShdw blurRad="40000" dist="23000" dir="5400000" rotWithShape="0">
-              <a:srgbClr val="000000">
-                <a:alpha val="35000"/>
-              </a:srgbClr>
-            </a:outerShdw>
-          </a:effectLst>
-          <a:scene3d>
-            <a:camera prst="orthographicFront">
-              <a:rot lat="0" lon="0" rev="0"/>
-            </a:camera>
-            <a:lightRig rig="threePt" dir="t">
-              <a:rot lat="0" lon="0" rev="1200000"/>
-            </a:lightRig>
-          </a:scene3d>
-          <a:sp3d>
-            <a:bevelT w="63500" h="25400"/>
-          </a:sp3d>
-        </a:effectStyle>
-      </a:effectStyleLst>
-      <a:bgFillStyleLst>
-        <a:solidFill>
-          <a:schemeClr val="phClr"/>
-        </a:solidFill>
-        <a:gradFill rotWithShape="1">
-          <a:gsLst>
-            <a:gs pos="0">
-              <a:schemeClr val="phClr">
-                <a:tint val="40000"/>
-                <a:satMod val="350000"/>
-              </a:schemeClr>
-            </a:gs>
-            <a:gs pos="40000">
-              <a:schemeClr val="phClr">
-                <a:tint val="45000"/>
-                <a:shade val="99000"/>
-                <a:satMod val="350000"/>
-              </a:schemeClr>
-            </a:gs>
-            <a:gs pos="100000">
-              <a:schemeClr val="phClr">
-                <a:shade val="20000"/>
-                <a:satMod val="255000"/>
-              </a:schemeClr>
-            </a:gs>
-          </a:gsLst>
-          <a:path path="circle">
-            <a:fillToRect l="50000" t="-80000" r="50000" b="180000"/>
-          </a:path>
-        </a:gradFill>
-        <a:gradFill rotWithShape="1">
-          <a:gsLst>
-            <a:gs pos="0">
-              <a:schemeClr val="phClr">
-                <a:tint val="80000"/>
-                <a:satMod val="300000"/>
-              </a:schemeClr>
-            </a:gs>
-            <a:gs pos="100000">
-              <a:schemeClr val="phClr">
-                <a:shade val="30000"/>
-                <a:satMod val="200000"/>
-              </a:schemeClr>
-            </a:gs>
-          </a:gsLst>
-          <a:path path="circle">
-            <a:fillToRect l="50000" t="50000" r="50000" b="50000"/>
-          </a:path>
-        </a:gradFill>
-      </a:bgFillStyleLst>
-    </a:fmtScheme>
-  </a:themeElements>
-</a:theme>
 </file>